--- a/assets/figures-editable/c3-c4/c3-e27.pptx
+++ b/assets/figures-editable/c3-c4/c3-e27.pptx
@@ -3104,8 +3104,8 @@
         </p:nvSpPr>
         <p:spPr>
           <a:xfrm>
-            <a:off x="274320" y="137160"/>
-            <a:ext cx="11612880" cy="365760"/>
+            <a:off x="274320" y="118872"/>
+            <a:ext cx="11612880" cy="340105"/>
           </a:xfrm>
           <a:prstGeom prst="rect">
             <a:avLst/>
@@ -3114,7 +3114,7 @@
           <a:effectLst/>
         </p:spPr>
         <p:txBody>
-          <a:bodyPr wrap="square" lIns="27432" rIns="27432" tIns="18288" bIns="18288" anchor="ctr">
+          <a:bodyPr wrap="none" lIns="18288" rIns="18288" tIns="18288" bIns="18288" anchor="t">
             <a:spAutoFit/>
           </a:bodyPr>
           <a:lstStyle/>
@@ -3125,7 +3125,7 @@
               </a:spcAft>
             </a:pPr>
             <a:r>
-              <a:rPr sz="2100" b="0" i="0">
+              <a:rPr sz="1900" b="1" i="0">
                 <a:solidFill>
                   <a:srgbClr val="8EDBD4"/>
                 </a:solidFill>
@@ -3136,23 +3136,20 @@
           </a:p>
         </p:txBody>
       </p:sp>
-      <p:sp>
-        <p:nvSpPr>
-          <p:cNvPr id="3" name="C3-E27 rect 1" descr="sci-ppt:o001"/>
-          <p:cNvSpPr/>
+      <p:cxnSp>
+        <p:nvCxnSpPr>
+          <p:cNvPr id="3" name="C3-E27 line 1" descr="sci-ppt:o001"/>
+          <p:cNvCxnSpPr/>
           <p:nvPr/>
-        </p:nvSpPr>
-        <p:spPr>
-          <a:xfrm>
-            <a:off x="594360" y="1417320"/>
-            <a:ext cx="3200400" cy="1325880"/>
-          </a:xfrm>
-          <a:prstGeom prst="rect">
+        </p:nvCxnSpPr>
+        <p:spPr>
+          <a:xfrm>
+            <a:off x="914400" y="4937760"/>
+            <a:ext cx="6035040" cy="0"/>
+          </a:xfrm>
+          <a:prstGeom prst="line">
             <a:avLst/>
           </a:prstGeom>
-          <a:solidFill>
-            <a:srgbClr val="213E4B"/>
-          </a:solidFill>
           <a:ln w="19050">
             <a:solidFill>
               <a:srgbClr val="B4C7D2"/>
@@ -3160,95 +3157,21 @@
           </a:ln>
           <a:effectLst/>
         </p:spPr>
-        <p:txBody>
-          <a:bodyPr rtlCol="0" anchor="ctr"/>
-          <a:lstStyle/>
-          <a:p>
-            <a:pPr algn="ctr"/>
-          </a:p>
-        </p:txBody>
-      </p:sp>
-      <p:sp>
-        <p:nvSpPr>
-          <p:cNvPr id="4" name="C3-E27 text 2" descr="sci-ppt:o002"/>
-          <p:cNvSpPr txBox="1"/>
-          <p:nvPr/>
-        </p:nvSpPr>
-        <p:spPr>
-          <a:xfrm>
-            <a:off x="758952" y="1627632"/>
-            <a:ext cx="2871216" cy="914400"/>
-          </a:xfrm>
-          <a:prstGeom prst="rect">
-            <a:avLst/>
-          </a:prstGeom>
-          <a:noFill/>
-          <a:effectLst/>
-        </p:spPr>
-        <p:txBody>
-          <a:bodyPr wrap="square" lIns="27432" rIns="27432" tIns="18288" bIns="18288" anchor="ctr">
-            <a:spAutoFit/>
-          </a:bodyPr>
-          <a:lstStyle/>
-          <a:p>
-            <a:pPr algn="l">
-              <a:spcAft>
-                <a:spcPts val="0"/>
-              </a:spcAft>
-            </a:pPr>
-            <a:r>
-              <a:rPr sz="1800" b="0" i="0">
-                <a:solidFill>
-                  <a:srgbClr val="E7F0F3"/>
-                </a:solidFill>
-                <a:latin typeface="Arial"/>
-              </a:rPr>
-              <a:t>Source allocation</a:t>
-            </a:r>
-          </a:p>
-        </p:txBody>
-      </p:sp>
+      </p:cxnSp>
       <p:cxnSp>
         <p:nvCxnSpPr>
-          <p:cNvPr id="5" name="C3-E27 arrow 3" descr="sci-ppt:o003"/>
+          <p:cNvPr id="4" name="C3-E27 line 2" descr="sci-ppt:o002"/>
           <p:cNvCxnSpPr/>
           <p:nvPr/>
         </p:nvCxnSpPr>
         <p:spPr>
           <a:xfrm>
-            <a:off x="3794760" y="2057400"/>
-            <a:ext cx="640080" cy="0"/>
+            <a:off x="914400" y="1371600"/>
+            <a:ext cx="0" cy="3566160"/>
           </a:xfrm>
           <a:prstGeom prst="line">
             <a:avLst/>
           </a:prstGeom>
-          <a:ln w="25400">
-            <a:solidFill>
-              <a:srgbClr val="8EDBD4"/>
-            </a:solidFill>
-            <a:headEnd type="none" w="med" len="med"/>
-            <a:tailEnd type="triangle" w="med" len="med"/>
-          </a:ln>
-          <a:effectLst/>
-        </p:spPr>
-      </p:cxnSp>
-      <p:sp>
-        <p:nvSpPr>
-          <p:cNvPr id="6" name="C3-E27 rect 4" descr="sci-ppt:o004"/>
-          <p:cNvSpPr/>
-          <p:nvPr/>
-        </p:nvSpPr>
-        <p:spPr>
-          <a:xfrm>
-            <a:off x="4480560" y="1417320"/>
-            <a:ext cx="3200400" cy="1325880"/>
-          </a:xfrm>
-          <a:prstGeom prst="rect">
-            <a:avLst/>
-          </a:prstGeom>
-          <a:solidFill>
-            <a:srgbClr val="213E4B"/>
-          </a:solidFill>
           <a:ln w="19050">
             <a:solidFill>
               <a:srgbClr val="B4C7D2"/>
@@ -3256,14 +3179,51 @@
           </a:ln>
           <a:effectLst/>
         </p:spPr>
-        <p:txBody>
-          <a:bodyPr rtlCol="0" anchor="ctr"/>
-          <a:lstStyle/>
-          <a:p>
-            <a:pPr algn="ctr"/>
-          </a:p>
-        </p:txBody>
-      </p:sp>
+      </p:cxnSp>
+      <p:cxnSp>
+        <p:nvCxnSpPr>
+          <p:cNvPr id="5" name="C3-E27 line 3" descr="sci-ppt:o003"/>
+          <p:cNvCxnSpPr/>
+          <p:nvPr/>
+        </p:nvCxnSpPr>
+        <p:spPr>
+          <a:xfrm>
+            <a:off x="914400" y="4937760"/>
+            <a:ext cx="0" cy="64008"/>
+          </a:xfrm>
+          <a:prstGeom prst="line">
+            <a:avLst/>
+          </a:prstGeom>
+          <a:ln w="12700">
+            <a:solidFill>
+              <a:srgbClr val="B4C7D2"/>
+            </a:solidFill>
+          </a:ln>
+          <a:effectLst/>
+        </p:spPr>
+      </p:cxnSp>
+      <p:cxnSp>
+        <p:nvCxnSpPr>
+          <p:cNvPr id="6" name="C3-E27 line 4" descr="sci-ppt:o004"/>
+          <p:cNvCxnSpPr/>
+          <p:nvPr/>
+        </p:nvCxnSpPr>
+        <p:spPr>
+          <a:xfrm>
+            <a:off x="914400" y="1371600"/>
+            <a:ext cx="0" cy="3566160"/>
+          </a:xfrm>
+          <a:prstGeom prst="line">
+            <a:avLst/>
+          </a:prstGeom>
+          <a:ln w="7620">
+            <a:solidFill>
+              <a:srgbClr val="2E4756"/>
+            </a:solidFill>
+          </a:ln>
+          <a:effectLst/>
+        </p:spPr>
+      </p:cxnSp>
       <p:sp>
         <p:nvSpPr>
           <p:cNvPr id="7" name="C3-E27 text 5" descr="sci-ppt:o005"/>
@@ -3272,8 +3232,8 @@
         </p:nvSpPr>
         <p:spPr>
           <a:xfrm>
-            <a:off x="4645152" y="1627632"/>
-            <a:ext cx="2871216" cy="914400"/>
+            <a:off x="457200" y="5020056"/>
+            <a:ext cx="914400" cy="208407"/>
           </a:xfrm>
           <a:prstGeom prst="rect">
             <a:avLst/>
@@ -3282,84 +3242,72 @@
           <a:effectLst/>
         </p:spPr>
         <p:txBody>
-          <a:bodyPr wrap="square" lIns="27432" rIns="27432" tIns="18288" bIns="18288" anchor="ctr">
+          <a:bodyPr wrap="none" lIns="18288" rIns="18288" tIns="18288" bIns="18288" anchor="t">
             <a:spAutoFit/>
           </a:bodyPr>
           <a:lstStyle/>
           <a:p>
-            <a:pPr algn="l">
+            <a:pPr algn="ctr">
               <a:spcAft>
                 <a:spcPts val="0"/>
               </a:spcAft>
             </a:pPr>
             <a:r>
-              <a:rPr sz="1800" b="0" i="0">
+              <a:rPr sz="1050" b="0" i="0">
                 <a:solidFill>
-                  <a:srgbClr val="E7F0F3"/>
+                  <a:srgbClr val="B4C7D2"/>
                 </a:solidFill>
                 <a:latin typeface="Arial"/>
               </a:rPr>
-              <a:t>Outgoing wave E_w</a:t>
+              <a:t>1</a:t>
             </a:r>
           </a:p>
         </p:txBody>
       </p:sp>
       <p:cxnSp>
         <p:nvCxnSpPr>
-          <p:cNvPr id="8" name="C3-E27 arrow 6" descr="sci-ppt:o006"/>
+          <p:cNvPr id="8" name="C3-E27 line 6" descr="sci-ppt:o006"/>
           <p:cNvCxnSpPr/>
           <p:nvPr/>
         </p:nvCxnSpPr>
         <p:spPr>
           <a:xfrm>
-            <a:off x="7680960" y="2057400"/>
-            <a:ext cx="640080" cy="0"/>
+            <a:off x="2125804" y="4937760"/>
+            <a:ext cx="0" cy="64008"/>
           </a:xfrm>
           <a:prstGeom prst="line">
             <a:avLst/>
           </a:prstGeom>
-          <a:ln w="25400">
-            <a:solidFill>
-              <a:srgbClr val="8EDBD4"/>
-            </a:solidFill>
-            <a:headEnd type="none" w="med" len="med"/>
-            <a:tailEnd type="triangle" w="med" len="med"/>
-          </a:ln>
-          <a:effectLst/>
-        </p:spPr>
-      </p:cxnSp>
-      <p:sp>
-        <p:nvSpPr>
-          <p:cNvPr id="9" name="C3-E27 rect 7" descr="sci-ppt:o007"/>
-          <p:cNvSpPr/>
-          <p:nvPr/>
-        </p:nvSpPr>
-        <p:spPr>
-          <a:xfrm>
-            <a:off x="8366760" y="1417320"/>
-            <a:ext cx="3200400" cy="1325880"/>
-          </a:xfrm>
-          <a:prstGeom prst="rect">
-            <a:avLst/>
-          </a:prstGeom>
-          <a:solidFill>
-            <a:srgbClr val="213E4B"/>
-          </a:solidFill>
-          <a:ln w="19050">
+          <a:ln w="12700">
             <a:solidFill>
               <a:srgbClr val="B4C7D2"/>
             </a:solidFill>
           </a:ln>
           <a:effectLst/>
         </p:spPr>
-        <p:txBody>
-          <a:bodyPr rtlCol="0" anchor="ctr"/>
-          <a:lstStyle/>
-          <a:p>
-            <a:pPr algn="ctr"/>
-          </a:p>
-        </p:txBody>
-      </p:sp>
+      </p:cxnSp>
+      <p:cxnSp>
+        <p:nvCxnSpPr>
+          <p:cNvPr id="9" name="C3-E27 line 7" descr="sci-ppt:o007"/>
+          <p:cNvCxnSpPr/>
+          <p:nvPr/>
+        </p:nvCxnSpPr>
+        <p:spPr>
+          <a:xfrm>
+            <a:off x="2125804" y="1371600"/>
+            <a:ext cx="0" cy="3566160"/>
+          </a:xfrm>
+          <a:prstGeom prst="line">
+            <a:avLst/>
+          </a:prstGeom>
+          <a:ln w="7620">
+            <a:solidFill>
+              <a:srgbClr val="2E4756"/>
+            </a:solidFill>
+          </a:ln>
+          <a:effectLst/>
+        </p:spPr>
+      </p:cxnSp>
       <p:sp>
         <p:nvSpPr>
           <p:cNvPr id="10" name="C3-E27 text 8" descr="sci-ppt:o008"/>
@@ -3368,8 +3316,8 @@
         </p:nvSpPr>
         <p:spPr>
           <a:xfrm>
-            <a:off x="8531352" y="1627632"/>
-            <a:ext cx="2871216" cy="914400"/>
+            <a:off x="1668604" y="5020056"/>
+            <a:ext cx="914400" cy="208407"/>
           </a:xfrm>
           <a:prstGeom prst="rect">
             <a:avLst/>
@@ -3378,68 +3326,50 @@
           <a:effectLst/>
         </p:spPr>
         <p:txBody>
-          <a:bodyPr wrap="square" lIns="27432" rIns="27432" tIns="18288" bIns="18288" anchor="ctr">
+          <a:bodyPr wrap="none" lIns="18288" rIns="18288" tIns="18288" bIns="18288" anchor="t">
             <a:spAutoFit/>
           </a:bodyPr>
           <a:lstStyle/>
           <a:p>
-            <a:pPr algn="l">
+            <a:pPr algn="ctr">
               <a:spcAft>
                 <a:spcPts val="0"/>
               </a:spcAft>
             </a:pPr>
             <a:r>
-              <a:rPr sz="1800" b="0" i="0">
+              <a:rPr sz="1050" b="0" i="0">
                 <a:solidFill>
-                  <a:srgbClr val="E7F0F3"/>
+                  <a:srgbClr val="B4C7D2"/>
                 </a:solidFill>
                 <a:latin typeface="Arial"/>
               </a:rPr>
-              <a:t>Finite A_o, τ_o observer</a:t>
-            </a:r>
-          </a:p>
-        </p:txBody>
-      </p:sp>
-      <p:sp>
-        <p:nvSpPr>
-          <p:cNvPr id="11" name="C3-E27 text 9" descr="sci-ppt:o009"/>
-          <p:cNvSpPr txBox="1"/>
+              <a:t>2</a:t>
+            </a:r>
+          </a:p>
+        </p:txBody>
+      </p:sp>
+      <p:cxnSp>
+        <p:nvCxnSpPr>
+          <p:cNvPr id="11" name="C3-E27 line 9" descr="sci-ppt:o009"/>
+          <p:cNvCxnSpPr/>
           <p:nvPr/>
-        </p:nvSpPr>
-        <p:spPr>
-          <a:xfrm>
-            <a:off x="731520" y="3246120"/>
-            <a:ext cx="10789920" cy="457200"/>
-          </a:xfrm>
-          <a:prstGeom prst="rect">
+        </p:nvCxnSpPr>
+        <p:spPr>
+          <a:xfrm>
+            <a:off x="3727194" y="4937760"/>
+            <a:ext cx="0" cy="64008"/>
+          </a:xfrm>
+          <a:prstGeom prst="line">
             <a:avLst/>
           </a:prstGeom>
-          <a:noFill/>
+          <a:ln w="12700">
+            <a:solidFill>
+              <a:srgbClr val="B4C7D2"/>
+            </a:solidFill>
+          </a:ln>
           <a:effectLst/>
         </p:spPr>
-        <p:txBody>
-          <a:bodyPr wrap="square" lIns="27432" rIns="27432" tIns="18288" bIns="18288" anchor="ctr">
-            <a:spAutoFit/>
-          </a:bodyPr>
-          <a:lstStyle/>
-          <a:p>
-            <a:pPr algn="l">
-              <a:spcAft>
-                <a:spcPts val="0"/>
-              </a:spcAft>
-            </a:pPr>
-            <a:r>
-              <a:rPr sz="1800" b="0" i="0">
-                <a:solidFill>
-                  <a:srgbClr val="8EDBD4"/>
-                </a:solidFill>
-                <a:latin typeface="Arial"/>
-              </a:rPr>
-              <a:t>Each energy allocation belongs to the same finite source budget.</a:t>
-            </a:r>
-          </a:p>
-        </p:txBody>
-      </p:sp>
+      </p:cxnSp>
       <p:cxnSp>
         <p:nvCxnSpPr>
           <p:cNvPr id="12" name="C3-E27 line 10" descr="sci-ppt:o010"/>
@@ -3448,30 +3378,114 @@
         </p:nvCxnSpPr>
         <p:spPr>
           <a:xfrm>
-            <a:off x="274320" y="3977639"/>
-            <a:ext cx="11612880" cy="0"/>
+            <a:off x="3727194" y="1371600"/>
+            <a:ext cx="0" cy="3566160"/>
+          </a:xfrm>
+          <a:prstGeom prst="line">
+            <a:avLst/>
+          </a:prstGeom>
+          <a:ln w="7620">
+            <a:solidFill>
+              <a:srgbClr val="2E4756"/>
+            </a:solidFill>
+          </a:ln>
+          <a:effectLst/>
+        </p:spPr>
+      </p:cxnSp>
+      <p:sp>
+        <p:nvSpPr>
+          <p:cNvPr id="13" name="C3-E27 text 11" descr="sci-ppt:o011"/>
+          <p:cNvSpPr txBox="1"/>
+          <p:nvPr/>
+        </p:nvSpPr>
+        <p:spPr>
+          <a:xfrm>
+            <a:off x="3269994" y="5020056"/>
+            <a:ext cx="914400" cy="208407"/>
+          </a:xfrm>
+          <a:prstGeom prst="rect">
+            <a:avLst/>
+          </a:prstGeom>
+          <a:noFill/>
+          <a:effectLst/>
+        </p:spPr>
+        <p:txBody>
+          <a:bodyPr wrap="none" lIns="18288" rIns="18288" tIns="18288" bIns="18288" anchor="t">
+            <a:spAutoFit/>
+          </a:bodyPr>
+          <a:lstStyle/>
+          <a:p>
+            <a:pPr algn="ctr">
+              <a:spcAft>
+                <a:spcPts val="0"/>
+              </a:spcAft>
+            </a:pPr>
+            <a:r>
+              <a:rPr sz="1050" b="0" i="0">
+                <a:solidFill>
+                  <a:srgbClr val="B4C7D2"/>
+                </a:solidFill>
+                <a:latin typeface="Arial"/>
+              </a:rPr>
+              <a:t>5</a:t>
+            </a:r>
+          </a:p>
+        </p:txBody>
+      </p:sp>
+      <p:cxnSp>
+        <p:nvCxnSpPr>
+          <p:cNvPr id="14" name="C3-E27 line 12" descr="sci-ppt:o012"/>
+          <p:cNvCxnSpPr/>
+          <p:nvPr/>
+        </p:nvCxnSpPr>
+        <p:spPr>
+          <a:xfrm>
+            <a:off x="4938599" y="4937760"/>
+            <a:ext cx="0" cy="64008"/>
           </a:xfrm>
           <a:prstGeom prst="line">
             <a:avLst/>
           </a:prstGeom>
           <a:ln w="12700">
             <a:solidFill>
-              <a:srgbClr val="405967"/>
+              <a:srgbClr val="B4C7D2"/>
             </a:solidFill>
           </a:ln>
           <a:effectLst/>
         </p:spPr>
       </p:cxnSp>
-      <p:sp>
-        <p:nvSpPr>
-          <p:cNvPr id="13" name="C3-E27 text 11" descr="sci-ppt:o011"/>
+      <p:cxnSp>
+        <p:nvCxnSpPr>
+          <p:cNvPr id="15" name="C3-E27 line 13" descr="sci-ppt:o013"/>
+          <p:cNvCxnSpPr/>
+          <p:nvPr/>
+        </p:nvCxnSpPr>
+        <p:spPr>
+          <a:xfrm>
+            <a:off x="4938599" y="1371600"/>
+            <a:ext cx="0" cy="3566160"/>
+          </a:xfrm>
+          <a:prstGeom prst="line">
+            <a:avLst/>
+          </a:prstGeom>
+          <a:ln w="7620">
+            <a:solidFill>
+              <a:srgbClr val="2E4756"/>
+            </a:solidFill>
+          </a:ln>
+          <a:effectLst/>
+        </p:spPr>
+      </p:cxnSp>
+      <p:sp>
+        <p:nvSpPr>
+          <p:cNvPr id="16" name="C3-E27 text 14" descr="sci-ppt:o014"/>
           <p:cNvSpPr txBox="1"/>
           <p:nvPr/>
         </p:nvSpPr>
         <p:spPr>
           <a:xfrm>
-            <a:off x="320040" y="4096512"/>
-            <a:ext cx="5715000" cy="246888"/>
+            <a:off x="4481399" y="5020056"/>
+            <a:ext cx="914400" cy="208407"/>
           </a:xfrm>
           <a:prstGeom prst="rect">
             <a:avLst/>
@@ -3480,7 +3494,445 @@
           <a:effectLst/>
         </p:spPr>
         <p:txBody>
-          <a:bodyPr wrap="square" lIns="27432" rIns="27432" tIns="18288" bIns="18288" anchor="ctr">
+          <a:bodyPr wrap="none" lIns="18288" rIns="18288" tIns="18288" bIns="18288" anchor="t">
+            <a:spAutoFit/>
+          </a:bodyPr>
+          <a:lstStyle/>
+          <a:p>
+            <a:pPr algn="ctr">
+              <a:spcAft>
+                <a:spcPts val="0"/>
+              </a:spcAft>
+            </a:pPr>
+            <a:r>
+              <a:rPr sz="1050" b="0" i="0">
+                <a:solidFill>
+                  <a:srgbClr val="B4C7D2"/>
+                </a:solidFill>
+                <a:latin typeface="Arial"/>
+              </a:rPr>
+              <a:t>10</a:t>
+            </a:r>
+          </a:p>
+        </p:txBody>
+      </p:sp>
+      <p:cxnSp>
+        <p:nvCxnSpPr>
+          <p:cNvPr id="17" name="C3-E27 line 15" descr="sci-ppt:o015"/>
+          <p:cNvCxnSpPr/>
+          <p:nvPr/>
+        </p:nvCxnSpPr>
+        <p:spPr>
+          <a:xfrm>
+            <a:off x="6858630" y="4937760"/>
+            <a:ext cx="0" cy="64008"/>
+          </a:xfrm>
+          <a:prstGeom prst="line">
+            <a:avLst/>
+          </a:prstGeom>
+          <a:ln w="12700">
+            <a:solidFill>
+              <a:srgbClr val="B4C7D2"/>
+            </a:solidFill>
+          </a:ln>
+          <a:effectLst/>
+        </p:spPr>
+      </p:cxnSp>
+      <p:cxnSp>
+        <p:nvCxnSpPr>
+          <p:cNvPr id="18" name="C3-E27 line 16" descr="sci-ppt:o016"/>
+          <p:cNvCxnSpPr/>
+          <p:nvPr/>
+        </p:nvCxnSpPr>
+        <p:spPr>
+          <a:xfrm>
+            <a:off x="6858630" y="1371600"/>
+            <a:ext cx="0" cy="3566160"/>
+          </a:xfrm>
+          <a:prstGeom prst="line">
+            <a:avLst/>
+          </a:prstGeom>
+          <a:ln w="7620">
+            <a:solidFill>
+              <a:srgbClr val="2E4756"/>
+            </a:solidFill>
+          </a:ln>
+          <a:effectLst/>
+        </p:spPr>
+      </p:cxnSp>
+      <p:sp>
+        <p:nvSpPr>
+          <p:cNvPr id="19" name="C3-E27 text 17" descr="sci-ppt:o017"/>
+          <p:cNvSpPr txBox="1"/>
+          <p:nvPr/>
+        </p:nvSpPr>
+        <p:spPr>
+          <a:xfrm>
+            <a:off x="6401430" y="5020056"/>
+            <a:ext cx="914400" cy="208407"/>
+          </a:xfrm>
+          <a:prstGeom prst="rect">
+            <a:avLst/>
+          </a:prstGeom>
+          <a:noFill/>
+          <a:effectLst/>
+        </p:spPr>
+        <p:txBody>
+          <a:bodyPr wrap="none" lIns="18288" rIns="18288" tIns="18288" bIns="18288" anchor="t">
+            <a:spAutoFit/>
+          </a:bodyPr>
+          <a:lstStyle/>
+          <a:p>
+            <a:pPr algn="ctr">
+              <a:spcAft>
+                <a:spcPts val="0"/>
+              </a:spcAft>
+            </a:pPr>
+            <a:r>
+              <a:rPr sz="1050" b="0" i="0">
+                <a:solidFill>
+                  <a:srgbClr val="B4C7D2"/>
+                </a:solidFill>
+                <a:latin typeface="Arial"/>
+              </a:rPr>
+              <a:t>30</a:t>
+            </a:r>
+          </a:p>
+        </p:txBody>
+      </p:sp>
+      <p:cxnSp>
+        <p:nvCxnSpPr>
+          <p:cNvPr id="20" name="C3-E27 line 18" descr="sci-ppt:o018"/>
+          <p:cNvCxnSpPr/>
+          <p:nvPr/>
+        </p:nvCxnSpPr>
+        <p:spPr>
+          <a:xfrm>
+            <a:off x="850392" y="4937760"/>
+            <a:ext cx="64008" cy="0"/>
+          </a:xfrm>
+          <a:prstGeom prst="line">
+            <a:avLst/>
+          </a:prstGeom>
+          <a:ln w="12700">
+            <a:solidFill>
+              <a:srgbClr val="B4C7D2"/>
+            </a:solidFill>
+          </a:ln>
+          <a:effectLst/>
+        </p:spPr>
+      </p:cxnSp>
+      <p:cxnSp>
+        <p:nvCxnSpPr>
+          <p:cNvPr id="21" name="C3-E27 line 19" descr="sci-ppt:o019"/>
+          <p:cNvCxnSpPr/>
+          <p:nvPr/>
+        </p:nvCxnSpPr>
+        <p:spPr>
+          <a:xfrm>
+            <a:off x="850392" y="3943004"/>
+            <a:ext cx="64008" cy="0"/>
+          </a:xfrm>
+          <a:prstGeom prst="line">
+            <a:avLst/>
+          </a:prstGeom>
+          <a:ln w="12700">
+            <a:solidFill>
+              <a:srgbClr val="B4C7D2"/>
+            </a:solidFill>
+          </a:ln>
+          <a:effectLst/>
+        </p:spPr>
+      </p:cxnSp>
+      <p:cxnSp>
+        <p:nvCxnSpPr>
+          <p:cNvPr id="22" name="C3-E27 line 20" descr="sci-ppt:o020"/>
+          <p:cNvCxnSpPr/>
+          <p:nvPr/>
+        </p:nvCxnSpPr>
+        <p:spPr>
+          <a:xfrm>
+            <a:off x="914400" y="3943004"/>
+            <a:ext cx="6035040" cy="0"/>
+          </a:xfrm>
+          <a:prstGeom prst="line">
+            <a:avLst/>
+          </a:prstGeom>
+          <a:ln w="7620">
+            <a:solidFill>
+              <a:srgbClr val="2E4756"/>
+            </a:solidFill>
+          </a:ln>
+          <a:effectLst/>
+        </p:spPr>
+      </p:cxnSp>
+      <p:sp>
+        <p:nvSpPr>
+          <p:cNvPr id="23" name="C3-E27 text 21" descr="sci-ppt:o021"/>
+          <p:cNvSpPr txBox="1"/>
+          <p:nvPr/>
+        </p:nvSpPr>
+        <p:spPr>
+          <a:xfrm>
+            <a:off x="45720" y="3860708"/>
+            <a:ext cx="777240" cy="208407"/>
+          </a:xfrm>
+          <a:prstGeom prst="rect">
+            <a:avLst/>
+          </a:prstGeom>
+          <a:noFill/>
+          <a:effectLst/>
+        </p:spPr>
+        <p:txBody>
+          <a:bodyPr wrap="none" lIns="18288" rIns="18288" tIns="18288" bIns="18288" anchor="t">
+            <a:spAutoFit/>
+          </a:bodyPr>
+          <a:lstStyle/>
+          <a:p>
+            <a:pPr algn="r">
+              <a:spcAft>
+                <a:spcPts val="0"/>
+              </a:spcAft>
+            </a:pPr>
+            <a:r>
+              <a:rPr sz="1050" b="0" i="0">
+                <a:solidFill>
+                  <a:srgbClr val="B4C7D2"/>
+                </a:solidFill>
+                <a:latin typeface="Arial"/>
+              </a:rPr>
+              <a:t>0.2</a:t>
+            </a:r>
+          </a:p>
+        </p:txBody>
+      </p:sp>
+      <p:cxnSp>
+        <p:nvCxnSpPr>
+          <p:cNvPr id="24" name="C3-E27 line 22" descr="sci-ppt:o022"/>
+          <p:cNvCxnSpPr/>
+          <p:nvPr/>
+        </p:nvCxnSpPr>
+        <p:spPr>
+          <a:xfrm>
+            <a:off x="850392" y="2628010"/>
+            <a:ext cx="64008" cy="0"/>
+          </a:xfrm>
+          <a:prstGeom prst="line">
+            <a:avLst/>
+          </a:prstGeom>
+          <a:ln w="12700">
+            <a:solidFill>
+              <a:srgbClr val="B4C7D2"/>
+            </a:solidFill>
+          </a:ln>
+          <a:effectLst/>
+        </p:spPr>
+      </p:cxnSp>
+      <p:cxnSp>
+        <p:nvCxnSpPr>
+          <p:cNvPr id="25" name="C3-E27 line 23" descr="sci-ppt:o023"/>
+          <p:cNvCxnSpPr/>
+          <p:nvPr/>
+        </p:nvCxnSpPr>
+        <p:spPr>
+          <a:xfrm>
+            <a:off x="914400" y="2628010"/>
+            <a:ext cx="6035040" cy="0"/>
+          </a:xfrm>
+          <a:prstGeom prst="line">
+            <a:avLst/>
+          </a:prstGeom>
+          <a:ln w="7620">
+            <a:solidFill>
+              <a:srgbClr val="2E4756"/>
+            </a:solidFill>
+          </a:ln>
+          <a:effectLst/>
+        </p:spPr>
+      </p:cxnSp>
+      <p:sp>
+        <p:nvSpPr>
+          <p:cNvPr id="26" name="C3-E27 text 24" descr="sci-ppt:o024"/>
+          <p:cNvSpPr txBox="1"/>
+          <p:nvPr/>
+        </p:nvSpPr>
+        <p:spPr>
+          <a:xfrm>
+            <a:off x="45720" y="2545714"/>
+            <a:ext cx="777240" cy="208407"/>
+          </a:xfrm>
+          <a:prstGeom prst="rect">
+            <a:avLst/>
+          </a:prstGeom>
+          <a:noFill/>
+          <a:effectLst/>
+        </p:spPr>
+        <p:txBody>
+          <a:bodyPr wrap="none" lIns="18288" rIns="18288" tIns="18288" bIns="18288" anchor="t">
+            <a:spAutoFit/>
+          </a:bodyPr>
+          <a:lstStyle/>
+          <a:p>
+            <a:pPr algn="r">
+              <a:spcAft>
+                <a:spcPts val="0"/>
+              </a:spcAft>
+            </a:pPr>
+            <a:r>
+              <a:rPr sz="1050" b="0" i="0">
+                <a:solidFill>
+                  <a:srgbClr val="B4C7D2"/>
+                </a:solidFill>
+                <a:latin typeface="Arial"/>
+              </a:rPr>
+              <a:t>0.5</a:t>
+            </a:r>
+          </a:p>
+        </p:txBody>
+      </p:sp>
+      <p:cxnSp>
+        <p:nvCxnSpPr>
+          <p:cNvPr id="27" name="C3-E27 line 25" descr="sci-ppt:o025"/>
+          <p:cNvCxnSpPr/>
+          <p:nvPr/>
+        </p:nvCxnSpPr>
+        <p:spPr>
+          <a:xfrm>
+            <a:off x="850392" y="1633254"/>
+            <a:ext cx="64008" cy="0"/>
+          </a:xfrm>
+          <a:prstGeom prst="line">
+            <a:avLst/>
+          </a:prstGeom>
+          <a:ln w="12700">
+            <a:solidFill>
+              <a:srgbClr val="B4C7D2"/>
+            </a:solidFill>
+          </a:ln>
+          <a:effectLst/>
+        </p:spPr>
+      </p:cxnSp>
+      <p:cxnSp>
+        <p:nvCxnSpPr>
+          <p:cNvPr id="28" name="C3-E27 line 26" descr="sci-ppt:o026"/>
+          <p:cNvCxnSpPr/>
+          <p:nvPr/>
+        </p:nvCxnSpPr>
+        <p:spPr>
+          <a:xfrm>
+            <a:off x="914400" y="1633254"/>
+            <a:ext cx="6035040" cy="0"/>
+          </a:xfrm>
+          <a:prstGeom prst="line">
+            <a:avLst/>
+          </a:prstGeom>
+          <a:ln w="7620">
+            <a:solidFill>
+              <a:srgbClr val="2E4756"/>
+            </a:solidFill>
+          </a:ln>
+          <a:effectLst/>
+        </p:spPr>
+      </p:cxnSp>
+      <p:sp>
+        <p:nvSpPr>
+          <p:cNvPr id="29" name="C3-E27 text 27" descr="sci-ppt:o027"/>
+          <p:cNvSpPr txBox="1"/>
+          <p:nvPr/>
+        </p:nvSpPr>
+        <p:spPr>
+          <a:xfrm>
+            <a:off x="45720" y="1550958"/>
+            <a:ext cx="777240" cy="208407"/>
+          </a:xfrm>
+          <a:prstGeom prst="rect">
+            <a:avLst/>
+          </a:prstGeom>
+          <a:noFill/>
+          <a:effectLst/>
+        </p:spPr>
+        <p:txBody>
+          <a:bodyPr wrap="none" lIns="18288" rIns="18288" tIns="18288" bIns="18288" anchor="t">
+            <a:spAutoFit/>
+          </a:bodyPr>
+          <a:lstStyle/>
+          <a:p>
+            <a:pPr algn="r">
+              <a:spcAft>
+                <a:spcPts val="0"/>
+              </a:spcAft>
+            </a:pPr>
+            <a:r>
+              <a:rPr sz="1050" b="0" i="0">
+                <a:solidFill>
+                  <a:srgbClr val="B4C7D2"/>
+                </a:solidFill>
+                <a:latin typeface="Arial"/>
+              </a:rPr>
+              <a:t>1</a:t>
+            </a:r>
+          </a:p>
+        </p:txBody>
+      </p:sp>
+      <p:sp>
+        <p:nvSpPr>
+          <p:cNvPr id="30" name="C3-E27 text 28" descr="sci-ppt:o028"/>
+          <p:cNvSpPr txBox="1"/>
+          <p:nvPr/>
+        </p:nvSpPr>
+        <p:spPr>
+          <a:xfrm>
+            <a:off x="914400" y="5221224"/>
+            <a:ext cx="6035040" cy="231648"/>
+          </a:xfrm>
+          <a:prstGeom prst="rect">
+            <a:avLst/>
+          </a:prstGeom>
+          <a:noFill/>
+          <a:effectLst/>
+        </p:spPr>
+        <p:txBody>
+          <a:bodyPr wrap="none" lIns="18288" rIns="18288" tIns="18288" bIns="18288" anchor="t">
+            <a:spAutoFit/>
+          </a:bodyPr>
+          <a:lstStyle/>
+          <a:p>
+            <a:pPr algn="ctr">
+              <a:spcAft>
+                <a:spcPts val="0"/>
+              </a:spcAft>
+            </a:pPr>
+            <a:r>
+              <a:rPr sz="1200" b="0" i="0">
+                <a:solidFill>
+                  <a:srgbClr val="E7F0F3"/>
+                </a:solidFill>
+                <a:latin typeface="Arial"/>
+              </a:rPr>
+              <a:t>window ratio τₒ / τ_eq</a:t>
+            </a:r>
+          </a:p>
+        </p:txBody>
+      </p:sp>
+      <p:sp>
+        <p:nvSpPr>
+          <p:cNvPr id="31" name="C3-E27 text 29" descr="sci-ppt:o029"/>
+          <p:cNvSpPr txBox="1"/>
+          <p:nvPr/>
+        </p:nvSpPr>
+        <p:spPr>
+          <a:xfrm>
+            <a:off x="365760" y="1024128"/>
+            <a:ext cx="6035040" cy="231648"/>
+          </a:xfrm>
+          <a:prstGeom prst="rect">
+            <a:avLst/>
+          </a:prstGeom>
+          <a:noFill/>
+          <a:effectLst/>
+        </p:spPr>
+        <p:txBody>
+          <a:bodyPr wrap="none" lIns="18288" rIns="18288" tIns="18288" bIns="18288" anchor="t">
             <a:spAutoFit/>
           </a:bodyPr>
           <a:lstStyle/>
@@ -3491,27 +3943,1100 @@
               </a:spcAft>
             </a:pPr>
             <a:r>
-              <a:rPr sz="1150" b="0" i="0">
+              <a:rPr sz="1200" b="0" i="0">
                 <a:solidFill>
-                  <a:srgbClr val="B4C7D2"/>
+                  <a:srgbClr val="E7F0F3"/>
                 </a:solidFill>
                 <a:latin typeface="Arial"/>
               </a:rPr>
-              <a:t>• p′ outgoing wave through A_o</a:t>
-            </a:r>
-          </a:p>
-        </p:txBody>
-      </p:sp>
-      <p:sp>
-        <p:nvSpPr>
-          <p:cNvPr id="14" name="C3-E27 text 12" descr="sci-ppt:o012"/>
+              <a:t>|p̄| / p₀</a:t>
+            </a:r>
+          </a:p>
+        </p:txBody>
+      </p:sp>
+      <p:sp>
+        <p:nvSpPr>
+          <p:cNvPr id="32" name="C3-E27 polygon 30" descr="sci-ppt:o030"/>
+          <p:cNvSpPr/>
+          <p:nvPr/>
+        </p:nvSpPr>
+        <p:spPr>
+          <a:xfrm>
+            <a:off x="914400" y="1633254"/>
+            <a:ext cx="4003977" cy="3287900"/>
+          </a:xfrm>
+          <a:custGeom>
+            <a:avLst/>
+            <a:gdLst/>
+            <a:ahLst/>
+            <a:cxnLst/>
+            <a:rect l="l" t="t" r="r" b="b"/>
+            <a:pathLst>
+              <a:path w="4003977" h="3287900">
+                <a:moveTo>
+                  <a:pt x="0" y="0"/>
+                </a:moveTo>
+                <a:lnTo>
+                  <a:pt x="30333" y="24909"/>
+                </a:lnTo>
+                <a:lnTo>
+                  <a:pt x="60666" y="49817"/>
+                </a:lnTo>
+                <a:lnTo>
+                  <a:pt x="90999" y="74725"/>
+                </a:lnTo>
+                <a:lnTo>
+                  <a:pt x="121332" y="99634"/>
+                </a:lnTo>
+                <a:lnTo>
+                  <a:pt x="151665" y="124542"/>
+                </a:lnTo>
+                <a:lnTo>
+                  <a:pt x="181998" y="149450"/>
+                </a:lnTo>
+                <a:lnTo>
+                  <a:pt x="212332" y="174359"/>
+                </a:lnTo>
+                <a:lnTo>
+                  <a:pt x="242665" y="199267"/>
+                </a:lnTo>
+                <a:lnTo>
+                  <a:pt x="272998" y="224175"/>
+                </a:lnTo>
+                <a:lnTo>
+                  <a:pt x="303331" y="249084"/>
+                </a:lnTo>
+                <a:lnTo>
+                  <a:pt x="333664" y="273992"/>
+                </a:lnTo>
+                <a:lnTo>
+                  <a:pt x="363997" y="298900"/>
+                </a:lnTo>
+                <a:lnTo>
+                  <a:pt x="394331" y="323809"/>
+                </a:lnTo>
+                <a:lnTo>
+                  <a:pt x="424664" y="348717"/>
+                </a:lnTo>
+                <a:lnTo>
+                  <a:pt x="454997" y="373625"/>
+                </a:lnTo>
+                <a:lnTo>
+                  <a:pt x="485330" y="398534"/>
+                </a:lnTo>
+                <a:lnTo>
+                  <a:pt x="515663" y="423442"/>
+                </a:lnTo>
+                <a:lnTo>
+                  <a:pt x="545996" y="448350"/>
+                </a:lnTo>
+                <a:lnTo>
+                  <a:pt x="576330" y="473259"/>
+                </a:lnTo>
+                <a:lnTo>
+                  <a:pt x="606663" y="498167"/>
+                </a:lnTo>
+                <a:lnTo>
+                  <a:pt x="636996" y="523075"/>
+                </a:lnTo>
+                <a:lnTo>
+                  <a:pt x="667329" y="547984"/>
+                </a:lnTo>
+                <a:lnTo>
+                  <a:pt x="697662" y="572892"/>
+                </a:lnTo>
+                <a:lnTo>
+                  <a:pt x="727995" y="597800"/>
+                </a:lnTo>
+                <a:lnTo>
+                  <a:pt x="758329" y="622709"/>
+                </a:lnTo>
+                <a:lnTo>
+                  <a:pt x="788662" y="647617"/>
+                </a:lnTo>
+                <a:lnTo>
+                  <a:pt x="818995" y="672525"/>
+                </a:lnTo>
+                <a:lnTo>
+                  <a:pt x="849328" y="697434"/>
+                </a:lnTo>
+                <a:lnTo>
+                  <a:pt x="879661" y="722342"/>
+                </a:lnTo>
+                <a:lnTo>
+                  <a:pt x="909994" y="747250"/>
+                </a:lnTo>
+                <a:lnTo>
+                  <a:pt x="940328" y="772159"/>
+                </a:lnTo>
+                <a:lnTo>
+                  <a:pt x="970661" y="797067"/>
+                </a:lnTo>
+                <a:lnTo>
+                  <a:pt x="1000994" y="821975"/>
+                </a:lnTo>
+                <a:lnTo>
+                  <a:pt x="1031327" y="846884"/>
+                </a:lnTo>
+                <a:lnTo>
+                  <a:pt x="1061660" y="871792"/>
+                </a:lnTo>
+                <a:lnTo>
+                  <a:pt x="1091993" y="896700"/>
+                </a:lnTo>
+                <a:lnTo>
+                  <a:pt x="1122326" y="921609"/>
+                </a:lnTo>
+                <a:lnTo>
+                  <a:pt x="1152660" y="946517"/>
+                </a:lnTo>
+                <a:lnTo>
+                  <a:pt x="1182993" y="971425"/>
+                </a:lnTo>
+                <a:lnTo>
+                  <a:pt x="1213326" y="996334"/>
+                </a:lnTo>
+                <a:lnTo>
+                  <a:pt x="1243659" y="1021242"/>
+                </a:lnTo>
+                <a:lnTo>
+                  <a:pt x="1273992" y="1046150"/>
+                </a:lnTo>
+                <a:lnTo>
+                  <a:pt x="1304325" y="1071059"/>
+                </a:lnTo>
+                <a:lnTo>
+                  <a:pt x="1334659" y="1095967"/>
+                </a:lnTo>
+                <a:lnTo>
+                  <a:pt x="1364992" y="1120875"/>
+                </a:lnTo>
+                <a:lnTo>
+                  <a:pt x="1395325" y="1145784"/>
+                </a:lnTo>
+                <a:lnTo>
+                  <a:pt x="1425658" y="1170692"/>
+                </a:lnTo>
+                <a:lnTo>
+                  <a:pt x="1455991" y="1195600"/>
+                </a:lnTo>
+                <a:lnTo>
+                  <a:pt x="1486324" y="1220509"/>
+                </a:lnTo>
+                <a:lnTo>
+                  <a:pt x="1516658" y="1245417"/>
+                </a:lnTo>
+                <a:lnTo>
+                  <a:pt x="1546991" y="1270325"/>
+                </a:lnTo>
+                <a:lnTo>
+                  <a:pt x="1577324" y="1295234"/>
+                </a:lnTo>
+                <a:lnTo>
+                  <a:pt x="1607657" y="1320142"/>
+                </a:lnTo>
+                <a:lnTo>
+                  <a:pt x="1637990" y="1345050"/>
+                </a:lnTo>
+                <a:lnTo>
+                  <a:pt x="1668323" y="1369959"/>
+                </a:lnTo>
+                <a:lnTo>
+                  <a:pt x="1698657" y="1394867"/>
+                </a:lnTo>
+                <a:lnTo>
+                  <a:pt x="1728990" y="1419775"/>
+                </a:lnTo>
+                <a:lnTo>
+                  <a:pt x="1759323" y="1444683"/>
+                </a:lnTo>
+                <a:lnTo>
+                  <a:pt x="1789656" y="1469592"/>
+                </a:lnTo>
+                <a:lnTo>
+                  <a:pt x="1819989" y="1494500"/>
+                </a:lnTo>
+                <a:lnTo>
+                  <a:pt x="1850322" y="1519408"/>
+                </a:lnTo>
+                <a:lnTo>
+                  <a:pt x="1880656" y="1544317"/>
+                </a:lnTo>
+                <a:lnTo>
+                  <a:pt x="1910989" y="1569225"/>
+                </a:lnTo>
+                <a:lnTo>
+                  <a:pt x="1941322" y="1594133"/>
+                </a:lnTo>
+                <a:lnTo>
+                  <a:pt x="1971655" y="1619042"/>
+                </a:lnTo>
+                <a:lnTo>
+                  <a:pt x="2001988" y="1643950"/>
+                </a:lnTo>
+                <a:lnTo>
+                  <a:pt x="2032321" y="1668858"/>
+                </a:lnTo>
+                <a:lnTo>
+                  <a:pt x="2062655" y="1693767"/>
+                </a:lnTo>
+                <a:lnTo>
+                  <a:pt x="2092988" y="1718675"/>
+                </a:lnTo>
+                <a:lnTo>
+                  <a:pt x="2123321" y="1743583"/>
+                </a:lnTo>
+                <a:lnTo>
+                  <a:pt x="2153654" y="1768492"/>
+                </a:lnTo>
+                <a:lnTo>
+                  <a:pt x="2183987" y="1793400"/>
+                </a:lnTo>
+                <a:lnTo>
+                  <a:pt x="2214320" y="1818308"/>
+                </a:lnTo>
+                <a:lnTo>
+                  <a:pt x="2244653" y="1843217"/>
+                </a:lnTo>
+                <a:lnTo>
+                  <a:pt x="2274987" y="1868125"/>
+                </a:lnTo>
+                <a:lnTo>
+                  <a:pt x="2305320" y="1893033"/>
+                </a:lnTo>
+                <a:lnTo>
+                  <a:pt x="2335653" y="1917942"/>
+                </a:lnTo>
+                <a:lnTo>
+                  <a:pt x="2365986" y="1942850"/>
+                </a:lnTo>
+                <a:lnTo>
+                  <a:pt x="2396319" y="1967758"/>
+                </a:lnTo>
+                <a:lnTo>
+                  <a:pt x="2426652" y="1992667"/>
+                </a:lnTo>
+                <a:lnTo>
+                  <a:pt x="2456986" y="2017575"/>
+                </a:lnTo>
+                <a:lnTo>
+                  <a:pt x="2487319" y="2042483"/>
+                </a:lnTo>
+                <a:lnTo>
+                  <a:pt x="2517652" y="2067392"/>
+                </a:lnTo>
+                <a:lnTo>
+                  <a:pt x="2547985" y="2092300"/>
+                </a:lnTo>
+                <a:lnTo>
+                  <a:pt x="2578318" y="2117208"/>
+                </a:lnTo>
+                <a:lnTo>
+                  <a:pt x="2608651" y="2142117"/>
+                </a:lnTo>
+                <a:lnTo>
+                  <a:pt x="2638985" y="2167025"/>
+                </a:lnTo>
+                <a:lnTo>
+                  <a:pt x="2669318" y="2191933"/>
+                </a:lnTo>
+                <a:lnTo>
+                  <a:pt x="2699651" y="2216842"/>
+                </a:lnTo>
+                <a:lnTo>
+                  <a:pt x="2729984" y="2241750"/>
+                </a:lnTo>
+                <a:lnTo>
+                  <a:pt x="2760317" y="2266658"/>
+                </a:lnTo>
+                <a:lnTo>
+                  <a:pt x="2790650" y="2291567"/>
+                </a:lnTo>
+                <a:lnTo>
+                  <a:pt x="2820984" y="2316475"/>
+                </a:lnTo>
+                <a:lnTo>
+                  <a:pt x="2851317" y="2341383"/>
+                </a:lnTo>
+                <a:lnTo>
+                  <a:pt x="2881650" y="2366292"/>
+                </a:lnTo>
+                <a:lnTo>
+                  <a:pt x="2911983" y="2391200"/>
+                </a:lnTo>
+                <a:lnTo>
+                  <a:pt x="2942316" y="2416108"/>
+                </a:lnTo>
+                <a:lnTo>
+                  <a:pt x="2972649" y="2441017"/>
+                </a:lnTo>
+                <a:lnTo>
+                  <a:pt x="3002983" y="2465925"/>
+                </a:lnTo>
+                <a:lnTo>
+                  <a:pt x="3033316" y="2490833"/>
+                </a:lnTo>
+                <a:lnTo>
+                  <a:pt x="3063649" y="2515742"/>
+                </a:lnTo>
+                <a:lnTo>
+                  <a:pt x="3093982" y="2540650"/>
+                </a:lnTo>
+                <a:lnTo>
+                  <a:pt x="3124315" y="2565558"/>
+                </a:lnTo>
+                <a:lnTo>
+                  <a:pt x="3154648" y="2590467"/>
+                </a:lnTo>
+                <a:lnTo>
+                  <a:pt x="3184982" y="2615375"/>
+                </a:lnTo>
+                <a:lnTo>
+                  <a:pt x="3215315" y="2640283"/>
+                </a:lnTo>
+                <a:lnTo>
+                  <a:pt x="3245648" y="2665192"/>
+                </a:lnTo>
+                <a:lnTo>
+                  <a:pt x="3275981" y="2690100"/>
+                </a:lnTo>
+                <a:lnTo>
+                  <a:pt x="3306314" y="2715008"/>
+                </a:lnTo>
+                <a:lnTo>
+                  <a:pt x="3336647" y="2739917"/>
+                </a:lnTo>
+                <a:lnTo>
+                  <a:pt x="3366980" y="2764825"/>
+                </a:lnTo>
+                <a:lnTo>
+                  <a:pt x="3397314" y="2789733"/>
+                </a:lnTo>
+                <a:lnTo>
+                  <a:pt x="3427647" y="2814642"/>
+                </a:lnTo>
+                <a:lnTo>
+                  <a:pt x="3457980" y="2839550"/>
+                </a:lnTo>
+                <a:lnTo>
+                  <a:pt x="3488313" y="2864458"/>
+                </a:lnTo>
+                <a:lnTo>
+                  <a:pt x="3518646" y="2889367"/>
+                </a:lnTo>
+                <a:lnTo>
+                  <a:pt x="3548979" y="2914275"/>
+                </a:lnTo>
+                <a:lnTo>
+                  <a:pt x="3579313" y="2939183"/>
+                </a:lnTo>
+                <a:lnTo>
+                  <a:pt x="3609646" y="2964092"/>
+                </a:lnTo>
+                <a:lnTo>
+                  <a:pt x="3639979" y="2989000"/>
+                </a:lnTo>
+                <a:lnTo>
+                  <a:pt x="3670312" y="3013908"/>
+                </a:lnTo>
+                <a:lnTo>
+                  <a:pt x="3700645" y="3038817"/>
+                </a:lnTo>
+                <a:lnTo>
+                  <a:pt x="3730978" y="3063725"/>
+                </a:lnTo>
+                <a:lnTo>
+                  <a:pt x="3761312" y="3088633"/>
+                </a:lnTo>
+                <a:lnTo>
+                  <a:pt x="3791645" y="3113542"/>
+                </a:lnTo>
+                <a:lnTo>
+                  <a:pt x="3821978" y="3138450"/>
+                </a:lnTo>
+                <a:lnTo>
+                  <a:pt x="3852311" y="3163358"/>
+                </a:lnTo>
+                <a:lnTo>
+                  <a:pt x="3882644" y="3188267"/>
+                </a:lnTo>
+                <a:lnTo>
+                  <a:pt x="3912977" y="3213175"/>
+                </a:lnTo>
+                <a:lnTo>
+                  <a:pt x="3943311" y="3238083"/>
+                </a:lnTo>
+                <a:lnTo>
+                  <a:pt x="3973644" y="3262992"/>
+                </a:lnTo>
+                <a:lnTo>
+                  <a:pt x="4003977" y="3287900"/>
+                </a:lnTo>
+              </a:path>
+            </a:pathLst>
+          </a:custGeom>
+          <a:noFill/>
+          <a:ln w="38100">
+            <a:solidFill>
+              <a:srgbClr val="8EDBD4"/>
+            </a:solidFill>
+          </a:ln>
+          <a:effectLst/>
+        </p:spPr>
+        <p:txBody>
+          <a:bodyPr rtlCol="0" anchor="ctr"/>
+          <a:lstStyle/>
+          <a:p>
+            <a:pPr algn="ctr"/>
+          </a:p>
+        </p:txBody>
+      </p:sp>
+      <p:sp>
+        <p:nvSpPr>
+          <p:cNvPr id="33" name="C3-E27 polygon 31" descr="sci-ppt:o031"/>
+          <p:cNvSpPr/>
+          <p:nvPr/>
+        </p:nvSpPr>
+        <p:spPr>
+          <a:xfrm>
+            <a:off x="914400" y="1633254"/>
+            <a:ext cx="6005966" cy="2465925"/>
+          </a:xfrm>
+          <a:custGeom>
+            <a:avLst/>
+            <a:gdLst/>
+            <a:ahLst/>
+            <a:cxnLst/>
+            <a:rect l="l" t="t" r="r" b="b"/>
+            <a:pathLst>
+              <a:path w="6005966" h="2465925">
+                <a:moveTo>
+                  <a:pt x="0" y="0"/>
+                </a:moveTo>
+                <a:lnTo>
+                  <a:pt x="30333" y="12455"/>
+                </a:lnTo>
+                <a:lnTo>
+                  <a:pt x="60666" y="24909"/>
+                </a:lnTo>
+                <a:lnTo>
+                  <a:pt x="90999" y="37363"/>
+                </a:lnTo>
+                <a:lnTo>
+                  <a:pt x="121332" y="49817"/>
+                </a:lnTo>
+                <a:lnTo>
+                  <a:pt x="151665" y="62271"/>
+                </a:lnTo>
+                <a:lnTo>
+                  <a:pt x="181998" y="74725"/>
+                </a:lnTo>
+                <a:lnTo>
+                  <a:pt x="212332" y="87179"/>
+                </a:lnTo>
+                <a:lnTo>
+                  <a:pt x="242665" y="99634"/>
+                </a:lnTo>
+                <a:lnTo>
+                  <a:pt x="272998" y="112088"/>
+                </a:lnTo>
+                <a:lnTo>
+                  <a:pt x="303331" y="124542"/>
+                </a:lnTo>
+                <a:lnTo>
+                  <a:pt x="333664" y="136996"/>
+                </a:lnTo>
+                <a:lnTo>
+                  <a:pt x="363997" y="149450"/>
+                </a:lnTo>
+                <a:lnTo>
+                  <a:pt x="394331" y="161904"/>
+                </a:lnTo>
+                <a:lnTo>
+                  <a:pt x="424664" y="174359"/>
+                </a:lnTo>
+                <a:lnTo>
+                  <a:pt x="454997" y="186813"/>
+                </a:lnTo>
+                <a:lnTo>
+                  <a:pt x="485330" y="199267"/>
+                </a:lnTo>
+                <a:lnTo>
+                  <a:pt x="515663" y="211721"/>
+                </a:lnTo>
+                <a:lnTo>
+                  <a:pt x="545996" y="224175"/>
+                </a:lnTo>
+                <a:lnTo>
+                  <a:pt x="576330" y="236629"/>
+                </a:lnTo>
+                <a:lnTo>
+                  <a:pt x="606663" y="249084"/>
+                </a:lnTo>
+                <a:lnTo>
+                  <a:pt x="636996" y="261538"/>
+                </a:lnTo>
+                <a:lnTo>
+                  <a:pt x="667329" y="273992"/>
+                </a:lnTo>
+                <a:lnTo>
+                  <a:pt x="697662" y="286446"/>
+                </a:lnTo>
+                <a:lnTo>
+                  <a:pt x="727995" y="298900"/>
+                </a:lnTo>
+                <a:lnTo>
+                  <a:pt x="758329" y="311354"/>
+                </a:lnTo>
+                <a:lnTo>
+                  <a:pt x="788662" y="323809"/>
+                </a:lnTo>
+                <a:lnTo>
+                  <a:pt x="818995" y="336263"/>
+                </a:lnTo>
+                <a:lnTo>
+                  <a:pt x="849328" y="348717"/>
+                </a:lnTo>
+                <a:lnTo>
+                  <a:pt x="879661" y="361171"/>
+                </a:lnTo>
+                <a:lnTo>
+                  <a:pt x="909994" y="373625"/>
+                </a:lnTo>
+                <a:lnTo>
+                  <a:pt x="940328" y="386079"/>
+                </a:lnTo>
+                <a:lnTo>
+                  <a:pt x="970661" y="398534"/>
+                </a:lnTo>
+                <a:lnTo>
+                  <a:pt x="1000994" y="410988"/>
+                </a:lnTo>
+                <a:lnTo>
+                  <a:pt x="1031327" y="423442"/>
+                </a:lnTo>
+                <a:lnTo>
+                  <a:pt x="1061660" y="435896"/>
+                </a:lnTo>
+                <a:lnTo>
+                  <a:pt x="1091993" y="448350"/>
+                </a:lnTo>
+                <a:lnTo>
+                  <a:pt x="1122326" y="460804"/>
+                </a:lnTo>
+                <a:lnTo>
+                  <a:pt x="1152660" y="473259"/>
+                </a:lnTo>
+                <a:lnTo>
+                  <a:pt x="1182993" y="485713"/>
+                </a:lnTo>
+                <a:lnTo>
+                  <a:pt x="1213326" y="498167"/>
+                </a:lnTo>
+                <a:lnTo>
+                  <a:pt x="1243659" y="510621"/>
+                </a:lnTo>
+                <a:lnTo>
+                  <a:pt x="1273992" y="523075"/>
+                </a:lnTo>
+                <a:lnTo>
+                  <a:pt x="1304325" y="535529"/>
+                </a:lnTo>
+                <a:lnTo>
+                  <a:pt x="1334659" y="547984"/>
+                </a:lnTo>
+                <a:lnTo>
+                  <a:pt x="1364992" y="560438"/>
+                </a:lnTo>
+                <a:lnTo>
+                  <a:pt x="1395325" y="572892"/>
+                </a:lnTo>
+                <a:lnTo>
+                  <a:pt x="1425658" y="585346"/>
+                </a:lnTo>
+                <a:lnTo>
+                  <a:pt x="1455991" y="597800"/>
+                </a:lnTo>
+                <a:lnTo>
+                  <a:pt x="1486324" y="610254"/>
+                </a:lnTo>
+                <a:lnTo>
+                  <a:pt x="1516658" y="622709"/>
+                </a:lnTo>
+                <a:lnTo>
+                  <a:pt x="1546991" y="635163"/>
+                </a:lnTo>
+                <a:lnTo>
+                  <a:pt x="1577324" y="647617"/>
+                </a:lnTo>
+                <a:lnTo>
+                  <a:pt x="1607657" y="660071"/>
+                </a:lnTo>
+                <a:lnTo>
+                  <a:pt x="1637990" y="672525"/>
+                </a:lnTo>
+                <a:lnTo>
+                  <a:pt x="1668323" y="684979"/>
+                </a:lnTo>
+                <a:lnTo>
+                  <a:pt x="1698657" y="697434"/>
+                </a:lnTo>
+                <a:lnTo>
+                  <a:pt x="1728990" y="709888"/>
+                </a:lnTo>
+                <a:lnTo>
+                  <a:pt x="1759323" y="722342"/>
+                </a:lnTo>
+                <a:lnTo>
+                  <a:pt x="1789656" y="734796"/>
+                </a:lnTo>
+                <a:lnTo>
+                  <a:pt x="1819989" y="747250"/>
+                </a:lnTo>
+                <a:lnTo>
+                  <a:pt x="1850322" y="759704"/>
+                </a:lnTo>
+                <a:lnTo>
+                  <a:pt x="1880656" y="772159"/>
+                </a:lnTo>
+                <a:lnTo>
+                  <a:pt x="1910989" y="784613"/>
+                </a:lnTo>
+                <a:lnTo>
+                  <a:pt x="1941322" y="797067"/>
+                </a:lnTo>
+                <a:lnTo>
+                  <a:pt x="1971655" y="809521"/>
+                </a:lnTo>
+                <a:lnTo>
+                  <a:pt x="2001988" y="821975"/>
+                </a:lnTo>
+                <a:lnTo>
+                  <a:pt x="2032321" y="834429"/>
+                </a:lnTo>
+                <a:lnTo>
+                  <a:pt x="2062655" y="846884"/>
+                </a:lnTo>
+                <a:lnTo>
+                  <a:pt x="2092988" y="859338"/>
+                </a:lnTo>
+                <a:lnTo>
+                  <a:pt x="2123321" y="871792"/>
+                </a:lnTo>
+                <a:lnTo>
+                  <a:pt x="2153654" y="884246"/>
+                </a:lnTo>
+                <a:lnTo>
+                  <a:pt x="2183987" y="896700"/>
+                </a:lnTo>
+                <a:lnTo>
+                  <a:pt x="2214320" y="909154"/>
+                </a:lnTo>
+                <a:lnTo>
+                  <a:pt x="2244653" y="921609"/>
+                </a:lnTo>
+                <a:lnTo>
+                  <a:pt x="2274987" y="934063"/>
+                </a:lnTo>
+                <a:lnTo>
+                  <a:pt x="2305320" y="946517"/>
+                </a:lnTo>
+                <a:lnTo>
+                  <a:pt x="2335653" y="958971"/>
+                </a:lnTo>
+                <a:lnTo>
+                  <a:pt x="2365986" y="971425"/>
+                </a:lnTo>
+                <a:lnTo>
+                  <a:pt x="2396319" y="983879"/>
+                </a:lnTo>
+                <a:lnTo>
+                  <a:pt x="2426652" y="996334"/>
+                </a:lnTo>
+                <a:lnTo>
+                  <a:pt x="2456986" y="1008788"/>
+                </a:lnTo>
+                <a:lnTo>
+                  <a:pt x="2487319" y="1021242"/>
+                </a:lnTo>
+                <a:lnTo>
+                  <a:pt x="2517652" y="1033696"/>
+                </a:lnTo>
+                <a:lnTo>
+                  <a:pt x="2547985" y="1046150"/>
+                </a:lnTo>
+                <a:lnTo>
+                  <a:pt x="2578318" y="1058604"/>
+                </a:lnTo>
+                <a:lnTo>
+                  <a:pt x="2608651" y="1071059"/>
+                </a:lnTo>
+                <a:lnTo>
+                  <a:pt x="2638985" y="1083513"/>
+                </a:lnTo>
+                <a:lnTo>
+                  <a:pt x="2669318" y="1095967"/>
+                </a:lnTo>
+                <a:lnTo>
+                  <a:pt x="2699651" y="1108421"/>
+                </a:lnTo>
+                <a:lnTo>
+                  <a:pt x="2729984" y="1120875"/>
+                </a:lnTo>
+                <a:lnTo>
+                  <a:pt x="2760317" y="1133329"/>
+                </a:lnTo>
+                <a:lnTo>
+                  <a:pt x="2790650" y="1145784"/>
+                </a:lnTo>
+                <a:lnTo>
+                  <a:pt x="2820984" y="1158238"/>
+                </a:lnTo>
+                <a:lnTo>
+                  <a:pt x="2851317" y="1170692"/>
+                </a:lnTo>
+                <a:lnTo>
+                  <a:pt x="2881650" y="1183146"/>
+                </a:lnTo>
+                <a:lnTo>
+                  <a:pt x="2911983" y="1195600"/>
+                </a:lnTo>
+                <a:lnTo>
+                  <a:pt x="2942316" y="1208054"/>
+                </a:lnTo>
+                <a:lnTo>
+                  <a:pt x="2972649" y="1220509"/>
+                </a:lnTo>
+                <a:lnTo>
+                  <a:pt x="3002983" y="1232963"/>
+                </a:lnTo>
+                <a:lnTo>
+                  <a:pt x="3033316" y="1245417"/>
+                </a:lnTo>
+                <a:lnTo>
+                  <a:pt x="3063649" y="1257871"/>
+                </a:lnTo>
+                <a:lnTo>
+                  <a:pt x="3093982" y="1270325"/>
+                </a:lnTo>
+                <a:lnTo>
+                  <a:pt x="3124315" y="1282779"/>
+                </a:lnTo>
+                <a:lnTo>
+                  <a:pt x="3154648" y="1295234"/>
+                </a:lnTo>
+                <a:lnTo>
+                  <a:pt x="3184982" y="1307688"/>
+                </a:lnTo>
+                <a:lnTo>
+                  <a:pt x="3215315" y="1320142"/>
+                </a:lnTo>
+                <a:lnTo>
+                  <a:pt x="3245648" y="1332596"/>
+                </a:lnTo>
+                <a:lnTo>
+                  <a:pt x="3275981" y="1345050"/>
+                </a:lnTo>
+                <a:lnTo>
+                  <a:pt x="3306314" y="1357504"/>
+                </a:lnTo>
+                <a:lnTo>
+                  <a:pt x="3336647" y="1369959"/>
+                </a:lnTo>
+                <a:lnTo>
+                  <a:pt x="3366980" y="1382413"/>
+                </a:lnTo>
+                <a:lnTo>
+                  <a:pt x="3397314" y="1394867"/>
+                </a:lnTo>
+                <a:lnTo>
+                  <a:pt x="3427647" y="1407321"/>
+                </a:lnTo>
+                <a:lnTo>
+                  <a:pt x="3457980" y="1419775"/>
+                </a:lnTo>
+                <a:lnTo>
+                  <a:pt x="3488313" y="1432229"/>
+                </a:lnTo>
+                <a:lnTo>
+                  <a:pt x="3518646" y="1444683"/>
+                </a:lnTo>
+                <a:lnTo>
+                  <a:pt x="3548979" y="1457138"/>
+                </a:lnTo>
+                <a:lnTo>
+                  <a:pt x="3579313" y="1469592"/>
+                </a:lnTo>
+                <a:lnTo>
+                  <a:pt x="3609646" y="1482046"/>
+                </a:lnTo>
+                <a:lnTo>
+                  <a:pt x="3639979" y="1494500"/>
+                </a:lnTo>
+                <a:lnTo>
+                  <a:pt x="3670312" y="1506954"/>
+                </a:lnTo>
+                <a:lnTo>
+                  <a:pt x="3700645" y="1519408"/>
+                </a:lnTo>
+                <a:lnTo>
+                  <a:pt x="3730978" y="1531863"/>
+                </a:lnTo>
+                <a:lnTo>
+                  <a:pt x="3761312" y="1544317"/>
+                </a:lnTo>
+                <a:lnTo>
+                  <a:pt x="3791645" y="1556771"/>
+                </a:lnTo>
+                <a:lnTo>
+                  <a:pt x="3821978" y="1569225"/>
+                </a:lnTo>
+                <a:lnTo>
+                  <a:pt x="3852311" y="1581679"/>
+                </a:lnTo>
+                <a:lnTo>
+                  <a:pt x="3882644" y="1594133"/>
+                </a:lnTo>
+                <a:lnTo>
+                  <a:pt x="3912977" y="1606588"/>
+                </a:lnTo>
+                <a:lnTo>
+                  <a:pt x="3943311" y="1619042"/>
+                </a:lnTo>
+                <a:lnTo>
+                  <a:pt x="3973644" y="1631496"/>
+                </a:lnTo>
+                <a:lnTo>
+                  <a:pt x="4003977" y="1643950"/>
+                </a:lnTo>
+                <a:lnTo>
+                  <a:pt x="4034310" y="1656404"/>
+                </a:lnTo>
+                <a:lnTo>
+                  <a:pt x="4064643" y="1668858"/>
+                </a:lnTo>
+                <a:lnTo>
+                  <a:pt x="4094976" y="1681313"/>
+                </a:lnTo>
+                <a:lnTo>
+                  <a:pt x="4125310" y="1693767"/>
+                </a:lnTo>
+                <a:lnTo>
+                  <a:pt x="4155643" y="1706221"/>
+                </a:lnTo>
+                <a:lnTo>
+                  <a:pt x="4185976" y="1718675"/>
+                </a:lnTo>
+                <a:lnTo>
+                  <a:pt x="4216309" y="1731129"/>
+                </a:lnTo>
+                <a:lnTo>
+                  <a:pt x="4246642" y="1743583"/>
+                </a:lnTo>
+                <a:lnTo>
+                  <a:pt x="4276975" y="1756038"/>
+                </a:lnTo>
+                <a:lnTo>
+                  <a:pt x="4307309" y="1768492"/>
+                </a:lnTo>
+                <a:lnTo>
+                  <a:pt x="4337642" y="1780946"/>
+                </a:lnTo>
+                <a:lnTo>
+                  <a:pt x="4367975" y="1793400"/>
+                </a:lnTo>
+                <a:lnTo>
+                  <a:pt x="4398308" y="1805854"/>
+                </a:lnTo>
+                <a:lnTo>
+                  <a:pt x="4428641" y="1818308"/>
+                </a:lnTo>
+                <a:lnTo>
+                  <a:pt x="4458974" y="1830763"/>
+                </a:lnTo>
+                <a:lnTo>
+                  <a:pt x="4489307" y="1843217"/>
+                </a:lnTo>
+                <a:lnTo>
+                  <a:pt x="4519641" y="1855671"/>
+                </a:lnTo>
+                <a:lnTo>
+                  <a:pt x="4549974" y="1868125"/>
+                </a:lnTo>
+                <a:lnTo>
+                  <a:pt x="4580307" y="1880579"/>
+                </a:lnTo>
+                <a:lnTo>
+                  <a:pt x="4610640" y="1893033"/>
+                </a:lnTo>
+                <a:lnTo>
+                  <a:pt x="4640973" y="1905488"/>
+                </a:lnTo>
+                <a:lnTo>
+                  <a:pt x="4671306" y="1917942"/>
+                </a:lnTo>
+                <a:lnTo>
+                  <a:pt x="4701640" y="1930396"/>
+                </a:lnTo>
+                <a:lnTo>
+                  <a:pt x="4731973" y="1942850"/>
+                </a:lnTo>
+                <a:lnTo>
+                  <a:pt x="4762306" y="1955304"/>
+                </a:lnTo>
+                <a:lnTo>
+                  <a:pt x="4792639" y="1967758"/>
+                </a:lnTo>
+                <a:lnTo>
+                  <a:pt x="4822972" y="1980213"/>
+                </a:lnTo>
+                <a:lnTo>
+                  <a:pt x="4853305" y="1992667"/>
+                </a:lnTo>
+                <a:lnTo>
+                  <a:pt x="4883639" y="2005121"/>
+                </a:lnTo>
+                <a:lnTo>
+                  <a:pt x="4913972" y="2017575"/>
+                </a:lnTo>
+                <a:lnTo>
+                  <a:pt x="4944305" y="2030029"/>
+                </a:lnTo>
+                <a:lnTo>
+                  <a:pt x="4974638" y="2042483"/>
+                </a:lnTo>
+                <a:lnTo>
+                  <a:pt x="5004971" y="2054938"/>
+                </a:lnTo>
+                <a:lnTo>
+                  <a:pt x="5035304" y="2067392"/>
+                </a:lnTo>
+                <a:lnTo>
+                  <a:pt x="5065638" y="2079846"/>
+                </a:lnTo>
+                <a:lnTo>
+                  <a:pt x="5095971" y="2092300"/>
+                </a:lnTo>
+                <a:lnTo>
+                  <a:pt x="5126304" y="2104754"/>
+                </a:lnTo>
+                <a:lnTo>
+                  <a:pt x="5156637" y="2117208"/>
+                </a:lnTo>
+                <a:lnTo>
+                  <a:pt x="5186970" y="2129663"/>
+                </a:lnTo>
+                <a:lnTo>
+                  <a:pt x="5217303" y="2142117"/>
+                </a:lnTo>
+                <a:lnTo>
+                  <a:pt x="5247637" y="2154571"/>
+                </a:lnTo>
+                <a:lnTo>
+                  <a:pt x="5277970" y="2167025"/>
+                </a:lnTo>
+                <a:lnTo>
+                  <a:pt x="5308303" y="2179479"/>
+                </a:lnTo>
+                <a:lnTo>
+                  <a:pt x="5338636" y="2191933"/>
+                </a:lnTo>
+                <a:lnTo>
+                  <a:pt x="5368969" y="2204388"/>
+                </a:lnTo>
+                <a:lnTo>
+                  <a:pt x="5399302" y="2216842"/>
+                </a:lnTo>
+                <a:lnTo>
+                  <a:pt x="5429636" y="2229296"/>
+                </a:lnTo>
+                <a:lnTo>
+                  <a:pt x="5459969" y="2241750"/>
+                </a:lnTo>
+                <a:lnTo>
+                  <a:pt x="5490302" y="2254204"/>
+                </a:lnTo>
+                <a:lnTo>
+                  <a:pt x="5520635" y="2266658"/>
+                </a:lnTo>
+                <a:lnTo>
+                  <a:pt x="5550968" y="2279113"/>
+                </a:lnTo>
+                <a:lnTo>
+                  <a:pt x="5581301" y="2291567"/>
+                </a:lnTo>
+                <a:lnTo>
+                  <a:pt x="5611634" y="2304021"/>
+                </a:lnTo>
+                <a:lnTo>
+                  <a:pt x="5641968" y="2316475"/>
+                </a:lnTo>
+                <a:lnTo>
+                  <a:pt x="5672301" y="2328929"/>
+                </a:lnTo>
+                <a:lnTo>
+                  <a:pt x="5702634" y="2341383"/>
+                </a:lnTo>
+                <a:lnTo>
+                  <a:pt x="5732967" y="2353838"/>
+                </a:lnTo>
+                <a:lnTo>
+                  <a:pt x="5763300" y="2366292"/>
+                </a:lnTo>
+                <a:lnTo>
+                  <a:pt x="5793633" y="2378746"/>
+                </a:lnTo>
+                <a:lnTo>
+                  <a:pt x="5823967" y="2391200"/>
+                </a:lnTo>
+                <a:lnTo>
+                  <a:pt x="5854300" y="2403654"/>
+                </a:lnTo>
+                <a:lnTo>
+                  <a:pt x="5884633" y="2416108"/>
+                </a:lnTo>
+                <a:lnTo>
+                  <a:pt x="5914966" y="2428563"/>
+                </a:lnTo>
+                <a:lnTo>
+                  <a:pt x="5945299" y="2441017"/>
+                </a:lnTo>
+                <a:lnTo>
+                  <a:pt x="5975632" y="2453471"/>
+                </a:lnTo>
+                <a:lnTo>
+                  <a:pt x="6005966" y="2465925"/>
+                </a:lnTo>
+              </a:path>
+            </a:pathLst>
+          </a:custGeom>
+          <a:noFill/>
+          <a:ln w="38100">
+            <a:solidFill>
+              <a:srgbClr val="F2B880"/>
+            </a:solidFill>
+            <a:prstDash val="dash"/>
+          </a:ln>
+          <a:effectLst/>
+        </p:spPr>
+        <p:txBody>
+          <a:bodyPr rtlCol="0" anchor="ctr"/>
+          <a:lstStyle/>
+          <a:p>
+            <a:pPr algn="ctr"/>
+          </a:p>
+        </p:txBody>
+      </p:sp>
+      <p:sp>
+        <p:nvSpPr>
+          <p:cNvPr id="34" name="C3-E27 text 32" descr="sci-ppt:o032"/>
           <p:cNvSpPr txBox="1"/>
           <p:nvPr/>
         </p:nvSpPr>
         <p:spPr>
           <a:xfrm>
-            <a:off x="6217920" y="4096512"/>
-            <a:ext cx="5715000" cy="246888"/>
+            <a:off x="1154124" y="4454879"/>
+            <a:ext cx="2926080" cy="231648"/>
           </a:xfrm>
           <a:prstGeom prst="rect">
             <a:avLst/>
@@ -3520,7 +5045,7 @@
           <a:effectLst/>
         </p:spPr>
         <p:txBody>
-          <a:bodyPr wrap="square" lIns="27432" rIns="27432" tIns="18288" bIns="18288" anchor="ctr">
+          <a:bodyPr wrap="none" lIns="18288" rIns="18288" tIns="18288" bIns="18288" anchor="t">
             <a:spAutoFit/>
           </a:bodyPr>
           <a:lstStyle/>
@@ -3531,27 +5056,27 @@
               </a:spcAft>
             </a:pPr>
             <a:r>
-              <a:rPr sz="1150" b="0" i="0">
+              <a:rPr sz="1200" b="0" i="0">
                 <a:solidFill>
-                  <a:srgbClr val="B4C7D2"/>
+                  <a:srgbClr val="8EDBD4"/>
                 </a:solidFill>
                 <a:latin typeface="Arial"/>
               </a:rPr>
-              <a:t>• Z_l wave impedance</a:t>
-            </a:r>
-          </a:p>
-        </p:txBody>
-      </p:sp>
-      <p:sp>
-        <p:nvSpPr>
-          <p:cNvPr id="15" name="C3-E27 text 13" descr="sci-ppt:o013"/>
+              <a:t>|p̄| = p₀ τ_eq/τₒ  (actual mean)</a:t>
+            </a:r>
+          </a:p>
+        </p:txBody>
+      </p:sp>
+      <p:sp>
+        <p:nvSpPr>
+          <p:cNvPr id="35" name="C3-E27 text 33" descr="sci-ppt:o033"/>
           <p:cNvSpPr txBox="1"/>
           <p:nvPr/>
         </p:nvSpPr>
         <p:spPr>
           <a:xfrm>
-            <a:off x="320040" y="4329684"/>
-            <a:ext cx="5715000" cy="246888"/>
+            <a:off x="2365529" y="1770614"/>
+            <a:ext cx="3474720" cy="231648"/>
           </a:xfrm>
           <a:prstGeom prst="rect">
             <a:avLst/>
@@ -3560,7 +5085,7 @@
           <a:effectLst/>
         </p:spPr>
         <p:txBody>
-          <a:bodyPr wrap="square" lIns="27432" rIns="27432" tIns="18288" bIns="18288" anchor="ctr">
+          <a:bodyPr wrap="none" lIns="18288" rIns="18288" tIns="18288" bIns="18288" anchor="t">
             <a:spAutoFit/>
           </a:bodyPr>
           <a:lstStyle/>
@@ -3571,27 +5096,59 @@
               </a:spcAft>
             </a:pPr>
             <a:r>
-              <a:rPr sz="1150" b="0" i="0">
+              <a:rPr sz="1200" b="0" i="0">
                 <a:solidFill>
-                  <a:srgbClr val="B4C7D2"/>
+                  <a:srgbClr val="F2B880"/>
                 </a:solidFill>
                 <a:latin typeface="Arial"/>
               </a:rPr>
-              <a:t>• τ_o, t observation window</a:t>
-            </a:r>
-          </a:p>
-        </p:txBody>
-      </p:sp>
-      <p:sp>
-        <p:nvSpPr>
-          <p:cNvPr id="16" name="C3-E27 text 14" descr="sci-ppt:o014"/>
+              <a:t>bound √(Zₗ E_w / A_oτₒ) = p₀ √(τ_eq/τₒ)</a:t>
+            </a:r>
+          </a:p>
+        </p:txBody>
+      </p:sp>
+      <p:sp>
+        <p:nvSpPr>
+          <p:cNvPr id="36" name="C3-E27 round_rect 34" descr="sci-ppt:o034"/>
+          <p:cNvSpPr/>
+          <p:nvPr/>
+        </p:nvSpPr>
+        <p:spPr>
+          <a:xfrm>
+            <a:off x="7223760" y="1371600"/>
+            <a:ext cx="4617720" cy="3566160"/>
+          </a:xfrm>
+          <a:prstGeom prst="roundRect">
+            <a:avLst/>
+          </a:prstGeom>
+          <a:solidFill>
+            <a:srgbClr val="213E4B"/>
+          </a:solidFill>
+          <a:ln w="20320">
+            <a:solidFill>
+              <a:srgbClr val="8EDBD4"/>
+            </a:solidFill>
+          </a:ln>
+          <a:effectLst/>
+        </p:spPr>
+        <p:txBody>
+          <a:bodyPr rtlCol="0" anchor="ctr"/>
+          <a:lstStyle/>
+          <a:p>
+            <a:pPr algn="ctr"/>
+          </a:p>
+        </p:txBody>
+      </p:sp>
+      <p:sp>
+        <p:nvSpPr>
+          <p:cNvPr id="37" name="C3-E27 text 35" descr="sci-ppt:o035"/>
           <p:cNvSpPr txBox="1"/>
           <p:nvPr/>
         </p:nvSpPr>
         <p:spPr>
           <a:xfrm>
-            <a:off x="6217920" y="4329684"/>
-            <a:ext cx="5715000" cy="246888"/>
+            <a:off x="7333488" y="1426464"/>
+            <a:ext cx="4398264" cy="254889"/>
           </a:xfrm>
           <a:prstGeom prst="rect">
             <a:avLst/>
@@ -3600,7 +5157,7 @@
           <a:effectLst/>
         </p:spPr>
         <p:txBody>
-          <a:bodyPr wrap="square" lIns="27432" rIns="27432" tIns="18288" bIns="18288" anchor="ctr">
+          <a:bodyPr wrap="none" lIns="18288" rIns="18288" tIns="18288" bIns="18288" anchor="t">
             <a:spAutoFit/>
           </a:bodyPr>
           <a:lstStyle/>
@@ -3611,27 +5168,27 @@
               </a:spcAft>
             </a:pPr>
             <a:r>
-              <a:rPr sz="1150" b="0" i="0">
+              <a:rPr sz="1350" b="1" i="0">
                 <a:solidFill>
-                  <a:srgbClr val="B4C7D2"/>
+                  <a:srgbClr val="8EDBD4"/>
                 </a:solidFill>
                 <a:latin typeface="Arial"/>
               </a:rPr>
-              <a:t>• E_w = ∫p′²/Z_l</a:t>
-            </a:r>
-          </a:p>
-        </p:txBody>
-      </p:sp>
-      <p:sp>
-        <p:nvSpPr>
-          <p:cNvPr id="17" name="C3-E27 text 15" descr="sci-ppt:o015"/>
+              <a:t>Finite window, finite energy</a:t>
+            </a:r>
+          </a:p>
+        </p:txBody>
+      </p:sp>
+      <p:sp>
+        <p:nvSpPr>
+          <p:cNvPr id="38" name="C3-E27 text 36" descr="sci-ppt:o036"/>
           <p:cNvSpPr txBox="1"/>
           <p:nvPr/>
         </p:nvSpPr>
         <p:spPr>
           <a:xfrm>
-            <a:off x="320040" y="4562856"/>
-            <a:ext cx="5715000" cy="246888"/>
+            <a:off x="7360920" y="1828800"/>
+            <a:ext cx="4389120" cy="239395"/>
           </a:xfrm>
           <a:prstGeom prst="rect">
             <a:avLst/>
@@ -3640,7 +5197,7 @@
           <a:effectLst/>
         </p:spPr>
         <p:txBody>
-          <a:bodyPr wrap="square" lIns="27432" rIns="27432" tIns="18288" bIns="18288" anchor="ctr">
+          <a:bodyPr wrap="none" lIns="18288" rIns="18288" tIns="18288" bIns="18288" anchor="t">
             <a:spAutoFit/>
           </a:bodyPr>
           <a:lstStyle/>
@@ -3651,27 +5208,27 @@
               </a:spcAft>
             </a:pPr>
             <a:r>
-              <a:rPr sz="1150" b="0" i="0">
+              <a:rPr sz="1250" b="1" i="0">
                 <a:solidFill>
-                  <a:srgbClr val="B4C7D2"/>
+                  <a:srgbClr val="E7F0F3"/>
                 </a:solidFill>
                 <a:latin typeface="Arial"/>
               </a:rPr>
-              <a:t>• p̄ signed observed mean</a:t>
-            </a:r>
-          </a:p>
-        </p:txBody>
-      </p:sp>
-      <p:sp>
-        <p:nvSpPr>
-          <p:cNvPr id="18" name="C3-E27 text 16" descr="sci-ppt:o016"/>
+              <a:t>E_w = ∫∫ p′²/Zₗ dA dt</a:t>
+            </a:r>
+          </a:p>
+        </p:txBody>
+      </p:sp>
+      <p:sp>
+        <p:nvSpPr>
+          <p:cNvPr id="39" name="C3-E27 text 37" descr="sci-ppt:o037"/>
           <p:cNvSpPr txBox="1"/>
           <p:nvPr/>
         </p:nvSpPr>
         <p:spPr>
           <a:xfrm>
-            <a:off x="6217920" y="4562856"/>
-            <a:ext cx="5715000" cy="246888"/>
+            <a:off x="7360920" y="2286000"/>
+            <a:ext cx="4389120" cy="231648"/>
           </a:xfrm>
           <a:prstGeom prst="rect">
             <a:avLst/>
@@ -3680,7 +5237,7 @@
           <a:effectLst/>
         </p:spPr>
         <p:txBody>
-          <a:bodyPr wrap="square" lIns="27432" rIns="27432" tIns="18288" bIns="18288" anchor="ctr">
+          <a:bodyPr wrap="none" lIns="18288" rIns="18288" tIns="18288" bIns="18288" anchor="t">
             <a:spAutoFit/>
           </a:bodyPr>
           <a:lstStyle/>
@@ -3691,27 +5248,27 @@
               </a:spcAft>
             </a:pPr>
             <a:r>
-              <a:rPr sz="1150" b="0" i="0">
+              <a:rPr sz="1200" b="1" i="0">
                 <a:solidFill>
-                  <a:srgbClr val="B4C7D2"/>
+                  <a:srgbClr val="F2B880"/>
                 </a:solidFill>
                 <a:latin typeface="Arial"/>
               </a:rPr>
-              <a:t>• dA spatial averaging</a:t>
-            </a:r>
-          </a:p>
-        </p:txBody>
-      </p:sp>
-      <p:sp>
-        <p:nvSpPr>
-          <p:cNvPr id="19" name="C3-E27 text 17" descr="sci-ppt:o017"/>
+              <a:t>|p̄|² ≤ (1/A_oτₒ) ∫∫ p′² dA dt = Zₗ E_w/(A_oτₒ)</a:t>
+            </a:r>
+          </a:p>
+        </p:txBody>
+      </p:sp>
+      <p:sp>
+        <p:nvSpPr>
+          <p:cNvPr id="40" name="C3-E27 text 38" descr="sci-ppt:o038"/>
           <p:cNvSpPr txBox="1"/>
           <p:nvPr/>
         </p:nvSpPr>
         <p:spPr>
           <a:xfrm>
-            <a:off x="320040" y="5596128"/>
-            <a:ext cx="11430000" cy="292608"/>
+            <a:off x="7562088" y="2926080"/>
+            <a:ext cx="4187952" cy="231648"/>
           </a:xfrm>
           <a:prstGeom prst="rect">
             <a:avLst/>
@@ -3720,7 +5277,7 @@
           <a:effectLst/>
         </p:spPr>
         <p:txBody>
-          <a:bodyPr wrap="square" lIns="27432" rIns="27432" tIns="18288" bIns="18288" anchor="ctr">
+          <a:bodyPr wrap="none" lIns="18288" rIns="18288" tIns="18288" bIns="18288" anchor="t">
             <a:spAutoFit/>
           </a:bodyPr>
           <a:lstStyle/>
@@ -3731,27 +5288,59 @@
               </a:spcAft>
             </a:pPr>
             <a:r>
-              <a:rPr sz="1150" b="0" i="0">
+              <a:rPr sz="1200" b="0" i="0">
                 <a:solidFill>
-                  <a:srgbClr val="8EDBD4"/>
+                  <a:srgbClr val="E7F0F3"/>
                 </a:solidFill>
                 <a:latin typeface="Arial"/>
               </a:rPr>
-              <a:t>Wave energy must be allocated from the same source budget</a:t>
-            </a:r>
-          </a:p>
-        </p:txBody>
-      </p:sp>
-      <p:sp>
-        <p:nvSpPr>
-          <p:cNvPr id="20" name="C3-E27 text 18" descr="sci-ppt:o018"/>
+              <a:t>Mean ≤ root-mean-square (Cauchy–Schwarz).</a:t>
+            </a:r>
+          </a:p>
+        </p:txBody>
+      </p:sp>
+      <p:sp>
+        <p:nvSpPr>
+          <p:cNvPr id="41" name="C3-E27 ellipse 39" descr="sci-ppt:o039"/>
+          <p:cNvSpPr/>
+          <p:nvPr/>
+        </p:nvSpPr>
+        <p:spPr>
+          <a:xfrm>
+            <a:off x="7392924" y="2979420"/>
+            <a:ext cx="82296" cy="82296"/>
+          </a:xfrm>
+          <a:prstGeom prst="ellipse">
+            <a:avLst/>
+          </a:prstGeom>
+          <a:solidFill>
+            <a:srgbClr val="8EDBD4"/>
+          </a:solidFill>
+          <a:ln w="12700">
+            <a:solidFill>
+              <a:srgbClr val="8EDBD4"/>
+            </a:solidFill>
+          </a:ln>
+          <a:effectLst/>
+        </p:spPr>
+        <p:txBody>
+          <a:bodyPr rtlCol="0" anchor="ctr"/>
+          <a:lstStyle/>
+          <a:p>
+            <a:pPr algn="ctr"/>
+          </a:p>
+        </p:txBody>
+      </p:sp>
+      <p:sp>
+        <p:nvSpPr>
+          <p:cNvPr id="42" name="C3-E27 text 40" descr="sci-ppt:o040"/>
           <p:cNvSpPr txBox="1"/>
           <p:nvPr/>
         </p:nvSpPr>
         <p:spPr>
           <a:xfrm>
-            <a:off x="320040" y="5870448"/>
-            <a:ext cx="11430000" cy="292608"/>
+            <a:off x="7562088" y="3203448"/>
+            <a:ext cx="4187952" cy="417576"/>
           </a:xfrm>
           <a:prstGeom prst="rect">
             <a:avLst/>
@@ -3760,7 +5349,7 @@
           <a:effectLst/>
         </p:spPr>
         <p:txBody>
-          <a:bodyPr wrap="square" lIns="27432" rIns="27432" tIns="18288" bIns="18288" anchor="ctr">
+          <a:bodyPr wrap="none" lIns="18288" rIns="18288" tIns="18288" bIns="18288" anchor="t">
             <a:spAutoFit/>
           </a:bodyPr>
           <a:lstStyle/>
@@ -3771,27 +5360,75 @@
               </a:spcAft>
             </a:pPr>
             <a:r>
-              <a:rPr sz="1150" b="0" i="0">
+              <a:rPr sz="1200" b="0" i="0">
                 <a:solidFill>
-                  <a:srgbClr val="8EDBD4"/>
+                  <a:srgbClr val="E7F0F3"/>
                 </a:solidFill>
                 <a:latin typeface="Arial"/>
               </a:rPr>
-              <a:t>This is a conditional wave bound, not universal film traction</a:t>
-            </a:r>
-          </a:p>
-        </p:txBody>
-      </p:sp>
-      <p:sp>
-        <p:nvSpPr>
-          <p:cNvPr id="21" name="C3-E27 text 19" descr="sci-ppt:o019"/>
+              <a:t>The bound uses the one-way wave relation u′ =</a:t>
+            </a:r>
+          </a:p>
+          <a:p>
+            <a:pPr algn="l">
+              <a:spcAft>
+                <a:spcPts val="0"/>
+              </a:spcAft>
+            </a:pPr>
+            <a:r>
+              <a:rPr sz="1200" b="0" i="0">
+                <a:solidFill>
+                  <a:srgbClr val="E7F0F3"/>
+                </a:solidFill>
+                <a:latin typeface="Arial"/>
+              </a:rPr>
+              <a:t>p′/Zₗ.</a:t>
+            </a:r>
+          </a:p>
+        </p:txBody>
+      </p:sp>
+      <p:sp>
+        <p:nvSpPr>
+          <p:cNvPr id="43" name="C3-E27 ellipse 41" descr="sci-ppt:o041"/>
+          <p:cNvSpPr/>
+          <p:nvPr/>
+        </p:nvSpPr>
+        <p:spPr>
+          <a:xfrm>
+            <a:off x="7392924" y="3256788"/>
+            <a:ext cx="82296" cy="82296"/>
+          </a:xfrm>
+          <a:prstGeom prst="ellipse">
+            <a:avLst/>
+          </a:prstGeom>
+          <a:solidFill>
+            <a:srgbClr val="8EDBD4"/>
+          </a:solidFill>
+          <a:ln w="12700">
+            <a:solidFill>
+              <a:srgbClr val="8EDBD4"/>
+            </a:solidFill>
+          </a:ln>
+          <a:effectLst/>
+        </p:spPr>
+        <p:txBody>
+          <a:bodyPr rtlCol="0" anchor="ctr"/>
+          <a:lstStyle/>
+          <a:p>
+            <a:pPr algn="ctr"/>
+          </a:p>
+        </p:txBody>
+      </p:sp>
+      <p:sp>
+        <p:nvSpPr>
+          <p:cNvPr id="44" name="C3-E27 text 42" descr="sci-ppt:o042"/>
           <p:cNvSpPr txBox="1"/>
           <p:nvPr/>
         </p:nvSpPr>
         <p:spPr>
           <a:xfrm>
-            <a:off x="320040" y="6473952"/>
-            <a:ext cx="11430000" cy="256032"/>
+            <a:off x="7562088" y="3666744"/>
+            <a:ext cx="4187952" cy="417576"/>
           </a:xfrm>
           <a:prstGeom prst="rect">
             <a:avLst/>
@@ -3800,7 +5437,151 @@
           <a:effectLst/>
         </p:spPr>
         <p:txBody>
-          <a:bodyPr wrap="square" lIns="27432" rIns="27432" tIns="18288" bIns="18288" anchor="ctr">
+          <a:bodyPr wrap="none" lIns="18288" rIns="18288" tIns="18288" bIns="18288" anchor="t">
+            <a:spAutoFit/>
+          </a:bodyPr>
+          <a:lstStyle/>
+          <a:p>
+            <a:pPr algn="l">
+              <a:spcAft>
+                <a:spcPts val="0"/>
+              </a:spcAft>
+            </a:pPr>
+            <a:r>
+              <a:rPr sz="1200" b="0" i="0">
+                <a:solidFill>
+                  <a:srgbClr val="E7F0F3"/>
+                </a:solidFill>
+                <a:latin typeface="Arial"/>
+              </a:rPr>
+              <a:t>A point spike with no measured area or time cannot</a:t>
+            </a:r>
+          </a:p>
+          <a:p>
+            <a:pPr algn="l">
+              <a:spcAft>
+                <a:spcPts val="0"/>
+              </a:spcAft>
+            </a:pPr>
+            <a:r>
+              <a:rPr sz="1200" b="0" i="0">
+                <a:solidFill>
+                  <a:srgbClr val="E7F0F3"/>
+                </a:solidFill>
+                <a:latin typeface="Arial"/>
+              </a:rPr>
+              <a:t>stand for delivered loading.</a:t>
+            </a:r>
+          </a:p>
+        </p:txBody>
+      </p:sp>
+      <p:sp>
+        <p:nvSpPr>
+          <p:cNvPr id="45" name="C3-E27 ellipse 43" descr="sci-ppt:o043"/>
+          <p:cNvSpPr/>
+          <p:nvPr/>
+        </p:nvSpPr>
+        <p:spPr>
+          <a:xfrm>
+            <a:off x="7392924" y="3720084"/>
+            <a:ext cx="82296" cy="82296"/>
+          </a:xfrm>
+          <a:prstGeom prst="ellipse">
+            <a:avLst/>
+          </a:prstGeom>
+          <a:solidFill>
+            <a:srgbClr val="8EDBD4"/>
+          </a:solidFill>
+          <a:ln w="12700">
+            <a:solidFill>
+              <a:srgbClr val="8EDBD4"/>
+            </a:solidFill>
+          </a:ln>
+          <a:effectLst/>
+        </p:spPr>
+        <p:txBody>
+          <a:bodyPr rtlCol="0" anchor="ctr"/>
+          <a:lstStyle/>
+          <a:p>
+            <a:pPr algn="ctr"/>
+          </a:p>
+        </p:txBody>
+      </p:sp>
+      <p:sp>
+        <p:nvSpPr>
+          <p:cNvPr id="46" name="C3-E27 text 44" descr="sci-ppt:o044"/>
+          <p:cNvSpPr txBox="1"/>
+          <p:nvPr/>
+        </p:nvSpPr>
+        <p:spPr>
+          <a:xfrm>
+            <a:off x="914400" y="5486400"/>
+            <a:ext cx="10972800" cy="433070"/>
+          </a:xfrm>
+          <a:prstGeom prst="rect">
+            <a:avLst/>
+          </a:prstGeom>
+          <a:noFill/>
+          <a:effectLst/>
+        </p:spPr>
+        <p:txBody>
+          <a:bodyPr wrap="none" lIns="18288" rIns="18288" tIns="18288" bIns="18288" anchor="t">
+            <a:spAutoFit/>
+          </a:bodyPr>
+          <a:lstStyle/>
+          <a:p>
+            <a:pPr algn="l">
+              <a:spcAft>
+                <a:spcPts val="0"/>
+              </a:spcAft>
+            </a:pPr>
+            <a:r>
+              <a:rPr sz="1250" b="0" i="0">
+                <a:solidFill>
+                  <a:srgbClr val="E7F0F3"/>
+                </a:solidFill>
+                <a:latin typeface="Arial"/>
+              </a:rPr>
+              <a:t>For a window longer than the pulse the true mean falls as 1/x while the energy bound falls only as 1/√x: the bound is safe, not</a:t>
+            </a:r>
+          </a:p>
+          <a:p>
+            <a:pPr algn="l">
+              <a:spcAft>
+                <a:spcPts val="0"/>
+              </a:spcAft>
+            </a:pPr>
+            <a:r>
+              <a:rPr sz="1250" b="0" i="0">
+                <a:solidFill>
+                  <a:srgbClr val="E7F0F3"/>
+                </a:solidFill>
+                <a:latin typeface="Arial"/>
+              </a:rPr>
+              <a:t>tight.</a:t>
+            </a:r>
+          </a:p>
+        </p:txBody>
+      </p:sp>
+      <p:sp>
+        <p:nvSpPr>
+          <p:cNvPr id="47" name="C3-E27 text 45" descr="sci-ppt:o045"/>
+          <p:cNvSpPr txBox="1"/>
+          <p:nvPr/>
+        </p:nvSpPr>
+        <p:spPr>
+          <a:xfrm>
+            <a:off x="320040" y="6510528"/>
+            <a:ext cx="11521440" cy="200660"/>
+          </a:xfrm>
+          <a:prstGeom prst="rect">
+            <a:avLst/>
+          </a:prstGeom>
+          <a:noFill/>
+          <a:effectLst/>
+        </p:spPr>
+        <p:txBody>
+          <a:bodyPr wrap="none" lIns="18288" rIns="18288" tIns="18288" bIns="18288" anchor="t">
             <a:spAutoFit/>
           </a:bodyPr>
           <a:lstStyle/>
@@ -3817,7 +5598,7 @@
                 </a:solidFill>
                 <a:latin typeface="Arial"/>
               </a:rPr>
-              <a:t>Model schematic; geometry is not to scale.</a:t>
+              <a:t>One-way-wave energy bound of Eq. C3-E27 evaluated for a rectangular pulse of amplitude p₀ and duration τ_eq.</a:t>
             </a:r>
           </a:p>
         </p:txBody>
